--- a/26fall/1860/Lecture/Week1.3/Lecture 1.3.1.pptx
+++ b/26fall/1860/Lecture/Week1.3/Lecture 1.3.1.pptx
@@ -167,22 +167,6 @@
 
 <file path=ppt/changesInfos/changesInfo1.xml><?xml version="1.0" encoding="utf-8"?>
 <pc:chgInfo xmlns:a="http://schemas.openxmlformats.org/drawingml/2006/main" xmlns:r="http://schemas.openxmlformats.org/officeDocument/2006/relationships" xmlns:ac="http://schemas.microsoft.com/office/drawing/2013/main/command" xmlns:pc="http://schemas.microsoft.com/office/powerpoint/2013/main/command">
-  <pc:docChgLst>
-    <pc:chgData name="James Dyer" userId="c78f284b-7e37-4191-b5a6-8e3806eb7037" providerId="ADAL" clId="{B6C7D5D4-CA5F-1A45-A6B5-C57EBC823EDA}"/>
-    <pc:docChg chg="delSld">
-      <pc:chgData name="James Dyer" userId="c78f284b-7e37-4191-b5a6-8e3806eb7037" providerId="ADAL" clId="{B6C7D5D4-CA5F-1A45-A6B5-C57EBC823EDA}" dt="2024-10-27T10:09:58.550" v="0" actId="21"/>
-      <pc:docMkLst>
-        <pc:docMk/>
-      </pc:docMkLst>
-      <pc:sldChg chg="del">
-        <pc:chgData name="James Dyer" userId="c78f284b-7e37-4191-b5a6-8e3806eb7037" providerId="ADAL" clId="{B6C7D5D4-CA5F-1A45-A6B5-C57EBC823EDA}" dt="2024-10-27T10:09:58.550" v="0" actId="21"/>
-        <pc:sldMkLst>
-          <pc:docMk/>
-          <pc:sldMk cId="12369796" sldId="307"/>
-        </pc:sldMkLst>
-      </pc:sldChg>
-    </pc:docChg>
-  </pc:docChgLst>
   <pc:docChgLst>
     <pc:chgData name="James Dyer" userId="c78f284b-7e37-4191-b5a6-8e3806eb7037" providerId="ADAL" clId="{DD9CC928-3F0B-4CEB-802A-1EC5DA3D8FB8}"/>
     <pc:docChg chg="undo custSel addSld delSld modSld sldOrd modMainMaster">
@@ -733,6 +717,52 @@
           </pc:sldLayoutMkLst>
         </pc:sldLayoutChg>
       </pc:sldMasterChg>
+    </pc:docChg>
+  </pc:docChgLst>
+  <pc:docChgLst>
+    <pc:chgData name="James Dyer" userId="c78f284b-7e37-4191-b5a6-8e3806eb7037" providerId="ADAL" clId="{B6C7D5D4-CA5F-1A45-A6B5-C57EBC823EDA}"/>
+    <pc:docChg chg="delSld">
+      <pc:chgData name="James Dyer" userId="c78f284b-7e37-4191-b5a6-8e3806eb7037" providerId="ADAL" clId="{B6C7D5D4-CA5F-1A45-A6B5-C57EBC823EDA}" dt="2024-10-27T10:09:58.550" v="0" actId="21"/>
+      <pc:docMkLst>
+        <pc:docMk/>
+      </pc:docMkLst>
+      <pc:sldChg chg="del">
+        <pc:chgData name="James Dyer" userId="c78f284b-7e37-4191-b5a6-8e3806eb7037" providerId="ADAL" clId="{B6C7D5D4-CA5F-1A45-A6B5-C57EBC823EDA}" dt="2024-10-27T10:09:58.550" v="0" actId="21"/>
+        <pc:sldMkLst>
+          <pc:docMk/>
+          <pc:sldMk cId="12369796" sldId="307"/>
+        </pc:sldMkLst>
+      </pc:sldChg>
+    </pc:docChg>
+  </pc:docChgLst>
+  <pc:docChgLst>
+    <pc:chgData name="James Dyer" userId="c78f284b-7e37-4191-b5a6-8e3806eb7037" providerId="ADAL" clId="{B614FF08-29E4-4BDE-9FCC-8AE054ABE75D}"/>
+    <pc:docChg chg="undo custSel addSld modSld">
+      <pc:chgData name="James Dyer" userId="c78f284b-7e37-4191-b5a6-8e3806eb7037" providerId="ADAL" clId="{B614FF08-29E4-4BDE-9FCC-8AE054ABE75D}" dt="2024-10-10T13:32:57.904" v="447" actId="20577"/>
+      <pc:docMkLst>
+        <pc:docMk/>
+      </pc:docMkLst>
+      <pc:sldChg chg="modSp new mod">
+        <pc:chgData name="James Dyer" userId="c78f284b-7e37-4191-b5a6-8e3806eb7037" providerId="ADAL" clId="{B614FF08-29E4-4BDE-9FCC-8AE054ABE75D}" dt="2024-10-10T12:00:22.662" v="89" actId="114"/>
+        <pc:sldMkLst>
+          <pc:docMk/>
+          <pc:sldMk cId="1103714128" sldId="339"/>
+        </pc:sldMkLst>
+      </pc:sldChg>
+      <pc:sldChg chg="modSp new mod">
+        <pc:chgData name="James Dyer" userId="c78f284b-7e37-4191-b5a6-8e3806eb7037" providerId="ADAL" clId="{B614FF08-29E4-4BDE-9FCC-8AE054ABE75D}" dt="2024-10-10T12:42:24.038" v="274" actId="20577"/>
+        <pc:sldMkLst>
+          <pc:docMk/>
+          <pc:sldMk cId="736415159" sldId="340"/>
+        </pc:sldMkLst>
+      </pc:sldChg>
+      <pc:sldChg chg="modSp new mod">
+        <pc:chgData name="James Dyer" userId="c78f284b-7e37-4191-b5a6-8e3806eb7037" providerId="ADAL" clId="{B614FF08-29E4-4BDE-9FCC-8AE054ABE75D}" dt="2024-10-10T13:32:57.904" v="447" actId="20577"/>
+        <pc:sldMkLst>
+          <pc:docMk/>
+          <pc:sldMk cId="522902213" sldId="341"/>
+        </pc:sldMkLst>
+      </pc:sldChg>
     </pc:docChg>
   </pc:docChgLst>
   <pc:docChgLst>
@@ -1326,36 +1356,6 @@
     </pc:docChg>
   </pc:docChgLst>
   <pc:docChgLst>
-    <pc:chgData name="James Dyer" userId="c78f284b-7e37-4191-b5a6-8e3806eb7037" providerId="ADAL" clId="{B614FF08-29E4-4BDE-9FCC-8AE054ABE75D}"/>
-    <pc:docChg chg="undo custSel addSld modSld">
-      <pc:chgData name="James Dyer" userId="c78f284b-7e37-4191-b5a6-8e3806eb7037" providerId="ADAL" clId="{B614FF08-29E4-4BDE-9FCC-8AE054ABE75D}" dt="2024-10-10T13:32:57.904" v="447" actId="20577"/>
-      <pc:docMkLst>
-        <pc:docMk/>
-      </pc:docMkLst>
-      <pc:sldChg chg="modSp new mod">
-        <pc:chgData name="James Dyer" userId="c78f284b-7e37-4191-b5a6-8e3806eb7037" providerId="ADAL" clId="{B614FF08-29E4-4BDE-9FCC-8AE054ABE75D}" dt="2024-10-10T12:00:22.662" v="89" actId="114"/>
-        <pc:sldMkLst>
-          <pc:docMk/>
-          <pc:sldMk cId="1103714128" sldId="339"/>
-        </pc:sldMkLst>
-      </pc:sldChg>
-      <pc:sldChg chg="modSp new mod">
-        <pc:chgData name="James Dyer" userId="c78f284b-7e37-4191-b5a6-8e3806eb7037" providerId="ADAL" clId="{B614FF08-29E4-4BDE-9FCC-8AE054ABE75D}" dt="2024-10-10T12:42:24.038" v="274" actId="20577"/>
-        <pc:sldMkLst>
-          <pc:docMk/>
-          <pc:sldMk cId="736415159" sldId="340"/>
-        </pc:sldMkLst>
-      </pc:sldChg>
-      <pc:sldChg chg="modSp new mod">
-        <pc:chgData name="James Dyer" userId="c78f284b-7e37-4191-b5a6-8e3806eb7037" providerId="ADAL" clId="{B614FF08-29E4-4BDE-9FCC-8AE054ABE75D}" dt="2024-10-10T13:32:57.904" v="447" actId="20577"/>
-        <pc:sldMkLst>
-          <pc:docMk/>
-          <pc:sldMk cId="522902213" sldId="341"/>
-        </pc:sldMkLst>
-      </pc:sldChg>
-    </pc:docChg>
-  </pc:docChgLst>
-  <pc:docChgLst>
     <pc:chgData name="James Dyer" userId="c78f284b-7e37-4191-b5a6-8e3806eb7037" providerId="ADAL" clId="{696DDC18-169C-184A-AFF6-6013D7FCC321}"/>
     <pc:docChg chg="addSld modSld">
       <pc:chgData name="James Dyer" userId="c78f284b-7e37-4191-b5a6-8e3806eb7037" providerId="ADAL" clId="{696DDC18-169C-184A-AFF6-6013D7FCC321}" dt="2025-03-21T08:04:45.238" v="47" actId="20577"/>
@@ -1503,6 +1503,22 @@
         <pc:sldMkLst>
           <pc:docMk/>
           <pc:sldMk cId="69145805" sldId="376"/>
+        </pc:sldMkLst>
+      </pc:sldChg>
+    </pc:docChg>
+  </pc:docChgLst>
+  <pc:docChgLst>
+    <pc:chgData name="James Dyer" userId="c78f284b-7e37-4191-b5a6-8e3806eb7037" providerId="ADAL" clId="{5E26BD48-1369-F441-A84C-31043F7D34A3}"/>
+    <pc:docChg chg="modSld">
+      <pc:chgData name="James Dyer" userId="c78f284b-7e37-4191-b5a6-8e3806eb7037" providerId="ADAL" clId="{5E26BD48-1369-F441-A84C-31043F7D34A3}" dt="2025-03-21T07:52:16.851" v="2" actId="20577"/>
+      <pc:docMkLst>
+        <pc:docMk/>
+      </pc:docMkLst>
+      <pc:sldChg chg="modSp">
+        <pc:chgData name="James Dyer" userId="c78f284b-7e37-4191-b5a6-8e3806eb7037" providerId="ADAL" clId="{5E26BD48-1369-F441-A84C-31043F7D34A3}" dt="2025-03-21T07:52:16.851" v="2" actId="20577"/>
+        <pc:sldMkLst>
+          <pc:docMk/>
+          <pc:sldMk cId="3954646310" sldId="365"/>
         </pc:sldMkLst>
       </pc:sldChg>
     </pc:docChg>
@@ -1701,22 +1717,6 @@
         <pc:sldMkLst>
           <pc:docMk/>
           <pc:sldMk cId="4293439759" sldId="344"/>
-        </pc:sldMkLst>
-      </pc:sldChg>
-    </pc:docChg>
-  </pc:docChgLst>
-  <pc:docChgLst>
-    <pc:chgData name="James Dyer" userId="c78f284b-7e37-4191-b5a6-8e3806eb7037" providerId="ADAL" clId="{5E26BD48-1369-F441-A84C-31043F7D34A3}"/>
-    <pc:docChg chg="modSld">
-      <pc:chgData name="James Dyer" userId="c78f284b-7e37-4191-b5a6-8e3806eb7037" providerId="ADAL" clId="{5E26BD48-1369-F441-A84C-31043F7D34A3}" dt="2025-03-21T07:52:16.851" v="2" actId="20577"/>
-      <pc:docMkLst>
-        <pc:docMk/>
-      </pc:docMkLst>
-      <pc:sldChg chg="modSp">
-        <pc:chgData name="James Dyer" userId="c78f284b-7e37-4191-b5a6-8e3806eb7037" providerId="ADAL" clId="{5E26BD48-1369-F441-A84C-31043F7D34A3}" dt="2025-03-21T07:52:16.851" v="2" actId="20577"/>
-        <pc:sldMkLst>
-          <pc:docMk/>
-          <pc:sldMk cId="3954646310" sldId="365"/>
         </pc:sldMkLst>
       </pc:sldChg>
     </pc:docChg>
@@ -12034,10 +12034,15 @@
             <p:ph sz="half" idx="1"/>
           </p:nvPr>
         </p:nvSpPr>
-        <p:spPr/>
+        <p:spPr>
+          <a:xfrm>
+            <a:off x="838200" y="1996966"/>
+            <a:ext cx="5530516" cy="4351338"/>
+          </a:xfrm>
+        </p:spPr>
         <p:txBody>
           <a:bodyPr>
-            <a:normAutofit fontScale="92500" lnSpcReduction="20000"/>
+            <a:normAutofit fontScale="92500" lnSpcReduction="10000"/>
           </a:bodyPr>
           <a:lstStyle/>
           <a:p>
@@ -12108,6 +12113,12 @@
               <a:rPr lang="en-GB" dirty="0"/>
               <a:t>Whole image represented as sequence of pixels</a:t>
             </a:r>
+          </a:p>
+          <a:p>
+            <a:pPr marL="457200" lvl="1" indent="0">
+              <a:buNone/>
+            </a:pPr>
+            <a:endParaRPr lang="en-GB" dirty="0"/>
           </a:p>
           <a:p>
             <a:r>
@@ -12231,8 +12242,8 @@
           </a:p>
         </p:txBody>
       </p:sp>
-      <mc:AlternateContent xmlns:mc="http://schemas.openxmlformats.org/markup-compatibility/2006" xmlns:a14="http://schemas.microsoft.com/office/drawing/2010/main">
-        <mc:Choice Requires="a14">
+      <mc:AlternateContent xmlns:mc="http://schemas.openxmlformats.org/markup-compatibility/2006">
+        <mc:Choice xmlns:a14="http://schemas.microsoft.com/office/drawing/2010/main" Requires="a14">
           <p:sp>
             <p:nvSpPr>
               <p:cNvPr id="6" name="Content Placeholder 5">
@@ -12249,7 +12260,12 @@
                 <p:ph sz="half" idx="1"/>
               </p:nvPr>
             </p:nvSpPr>
-            <p:spPr/>
+            <p:spPr>
+              <a:xfrm>
+                <a:off x="240632" y="2012418"/>
+                <a:ext cx="5779168" cy="4351338"/>
+              </a:xfrm>
+            </p:spPr>
             <p:txBody>
               <a:bodyPr/>
               <a:lstStyle/>
@@ -12272,6 +12288,19 @@
                   <a:rPr lang="en-GB" dirty="0"/>
                   <a:t>-bit string which encodes its colour</a:t>
                 </a:r>
+                <a:r>
+                  <a:rPr lang="zh-CN" altLang="en-US" dirty="0"/>
+                  <a:t>（</a:t>
+                </a:r>
+                <a:r>
+                  <a:rPr lang="en-US" altLang="zh-CN" dirty="0"/>
+                  <a:t>color depth</a:t>
+                </a:r>
+                <a:r>
+                  <a:rPr lang="zh-CN" altLang="en-US" dirty="0"/>
+                  <a:t>）</a:t>
+                </a:r>
+                <a:endParaRPr lang="en-GB" dirty="0"/>
               </a:p>
               <a:p>
                 <a:pPr lvl="1"/>
@@ -12279,6 +12308,12 @@
                   <a:rPr lang="en-GB" dirty="0"/>
                   <a:t>Most images use 24-bits for pixels</a:t>
                 </a:r>
+              </a:p>
+              <a:p>
+                <a:pPr marL="457200" lvl="1" indent="0">
+                  <a:buNone/>
+                </a:pPr>
+                <a:endParaRPr lang="en-GB" dirty="0"/>
               </a:p>
               <a:p>
                 <a:r>
@@ -12350,7 +12385,7 @@
             </p:txBody>
           </p:sp>
         </mc:Choice>
-        <mc:Fallback xmlns="">
+        <mc:Fallback>
           <p:sp>
             <p:nvSpPr>
               <p:cNvPr id="6" name="Content Placeholder 5">
@@ -12368,10 +12403,14 @@
               </p:nvPr>
             </p:nvSpPr>
             <p:spPr>
+              <a:xfrm>
+                <a:off x="240632" y="2012418"/>
+                <a:ext cx="5779168" cy="4351338"/>
+              </a:xfrm>
               <a:blipFill>
                 <a:blip r:embed="rId2"/>
                 <a:stretch>
-                  <a:fillRect l="-2118" t="-2241" r="-3176"/>
+                  <a:fillRect l="-1897" t="-2241" r="-3477"/>
                 </a:stretch>
               </a:blipFill>
             </p:spPr>
@@ -12380,7 +12419,7 @@
               <a:lstStyle/>
               <a:p>
                 <a:r>
-                  <a:rPr lang="en-GB">
+                  <a:rPr lang="zh-CN" altLang="en-US">
                     <a:noFill/>
                   </a:rPr>
                   <a:t> </a:t>
@@ -13243,13 +13282,29 @@
           <a:p>
             <a:r>
               <a:rPr lang="en-GB" dirty="0"/>
-              <a:t>PGM is a simple image file format which is text based</a:t>
-            </a:r>
-          </a:p>
-          <a:p>
-            <a:r>
-              <a:rPr lang="en-GB" dirty="0"/>
-              <a:t>Supports greyscale images only</a:t>
+              <a:t>PGM is a simple image file format which is </a:t>
+            </a:r>
+            <a:r>
+              <a:rPr lang="en-GB" dirty="0">
+                <a:solidFill>
+                  <a:srgbClr val="FF0000"/>
+                </a:solidFill>
+              </a:rPr>
+              <a:t>text based</a:t>
+            </a:r>
+          </a:p>
+          <a:p>
+            <a:r>
+              <a:rPr lang="en-GB" dirty="0"/>
+              <a:t>Supports </a:t>
+            </a:r>
+            <a:r>
+              <a:rPr lang="en-GB" dirty="0">
+                <a:solidFill>
+                  <a:srgbClr val="FF0000"/>
+                </a:solidFill>
+              </a:rPr>
+              <a:t>greyscale images only</a:t>
             </a:r>
           </a:p>
           <a:p>
@@ -18204,6 +18259,11 @@
               <a:rPr lang="en-GB" dirty="0"/>
               <a:t>Lossless</a:t>
             </a:r>
+            <a:r>
+              <a:rPr lang="zh-CN" altLang="en-US" dirty="0"/>
+              <a:t>（无损压缩）</a:t>
+            </a:r>
+            <a:endParaRPr lang="en-GB" dirty="0"/>
           </a:p>
           <a:p>
             <a:pPr lvl="2"/>
@@ -18234,23 +18294,29 @@
             </a:r>
           </a:p>
           <a:p>
+            <a:pPr marL="914400" lvl="2" indent="0">
+              <a:buNone/>
+            </a:pPr>
+            <a:endParaRPr lang="en-GB" dirty="0"/>
+          </a:p>
+          <a:p>
             <a:pPr lvl="1"/>
             <a:r>
               <a:rPr lang="en-GB" dirty="0"/>
               <a:t>Lossy</a:t>
             </a:r>
+            <a:r>
+              <a:rPr lang="zh-CN" altLang="en-US" dirty="0"/>
+              <a:t>（有损压缩）</a:t>
+            </a:r>
+            <a:endParaRPr lang="en-GB" dirty="0"/>
           </a:p>
           <a:p>
             <a:pPr lvl="2"/>
             <a:r>
               <a:rPr lang="en-GB" dirty="0"/>
-              <a:t>Some data sacrificed to </a:t>
-            </a:r>
-            <a:r>
-              <a:rPr lang="en-GB"/>
-              <a:t>make smaller</a:t>
-            </a:r>
-            <a:endParaRPr lang="en-GB" dirty="0"/>
+              <a:t>Some data sacrificed to make smaller</a:t>
+            </a:r>
           </a:p>
           <a:p>
             <a:pPr lvl="2"/>
@@ -19009,10 +19075,15 @@
             <p:ph sz="half" idx="1"/>
           </p:nvPr>
         </p:nvSpPr>
-        <p:spPr/>
+        <p:spPr>
+          <a:xfrm>
+            <a:off x="420414" y="1825625"/>
+            <a:ext cx="5599386" cy="4351338"/>
+          </a:xfrm>
+        </p:spPr>
         <p:txBody>
           <a:bodyPr>
-            <a:normAutofit fontScale="92500" lnSpcReduction="20000"/>
+            <a:normAutofit fontScale="85000" lnSpcReduction="20000"/>
           </a:bodyPr>
           <a:lstStyle/>
           <a:p>
@@ -19030,8 +19101,17 @@
           <a:p>
             <a:r>
               <a:rPr lang="en-GB" dirty="0"/>
-              <a:t>Expressed as a triplet of values</a:t>
-            </a:r>
+              <a:t>Expressed as a triplet of values(</a:t>
+            </a:r>
+            <a:r>
+              <a:rPr lang="zh-CN" altLang="en-US" dirty="0"/>
+              <a:t>三元组</a:t>
+            </a:r>
+            <a:r>
+              <a:rPr lang="en-US" altLang="zh-CN" dirty="0"/>
+              <a:t>)</a:t>
+            </a:r>
+            <a:endParaRPr lang="en-GB" dirty="0"/>
           </a:p>
           <a:p>
             <a:pPr lvl="1"/>
@@ -19572,7 +19652,15 @@
           <a:p>
             <a:r>
               <a:rPr lang="en-GB" dirty="0"/>
-              <a:t>Combining CMY components subtracts light colours</a:t>
+              <a:t>Combining CMY components subtracts light colours(</a:t>
+            </a:r>
+            <a:r>
+              <a:rPr lang="zh-CN" altLang="en-US" dirty="0"/>
+              <a:t>减少浅色</a:t>
+            </a:r>
+            <a:r>
+              <a:rPr lang="en-GB" dirty="0"/>
+              <a:t>)</a:t>
             </a:r>
           </a:p>
           <a:p>
@@ -19590,7 +19678,11 @@
           </a:p>
           <a:p>
             <a:r>
-              <a:rPr lang="en-GB" dirty="0"/>
+              <a:rPr lang="en-GB" dirty="0">
+                <a:solidFill>
+                  <a:srgbClr val="FF0000"/>
+                </a:solidFill>
+              </a:rPr>
               <a:t>Typically used in printers</a:t>
             </a:r>
           </a:p>
@@ -19603,13 +19695,21 @@
           </a:p>
           <a:p>
             <a:r>
-              <a:rPr lang="en-GB" dirty="0"/>
+              <a:rPr lang="en-GB" dirty="0">
+                <a:solidFill>
+                  <a:srgbClr val="FF0000"/>
+                </a:solidFill>
+              </a:rPr>
               <a:t>Similarly to RGB colour can be expressed as tuple of C, M, Y, and K values</a:t>
             </a:r>
           </a:p>
           <a:p>
             <a:pPr lvl="1"/>
-            <a:endParaRPr lang="en-GB" dirty="0"/>
+            <a:endParaRPr lang="en-GB" dirty="0">
+              <a:solidFill>
+                <a:srgbClr val="FF0000"/>
+              </a:solidFill>
+            </a:endParaRPr>
           </a:p>
           <a:p>
             <a:endParaRPr lang="en-GB" dirty="0"/>
@@ -19805,14 +19905,46 @@
           <a:p>
             <a:r>
               <a:rPr lang="en-GB" dirty="0"/>
-              <a:t>HSV represents colour as point in cylinder</a:t>
+              <a:t>HSV represents colour as </a:t>
+            </a:r>
+            <a:r>
+              <a:rPr lang="en-GB" dirty="0">
+                <a:solidFill>
+                  <a:srgbClr val="FF0000"/>
+                </a:solidFill>
+              </a:rPr>
+              <a:t>point in cylinder</a:t>
             </a:r>
           </a:p>
           <a:p>
             <a:pPr lvl="1"/>
             <a:r>
-              <a:rPr lang="en-GB" dirty="0"/>
-              <a:t>Hue is represented as angle</a:t>
+              <a:rPr lang="en-GB" dirty="0">
+                <a:solidFill>
+                  <a:srgbClr val="FF0000"/>
+                </a:solidFill>
+              </a:rPr>
+              <a:t>Hue(</a:t>
+            </a:r>
+            <a:r>
+              <a:rPr lang="zh-CN" altLang="en-US" dirty="0">
+                <a:solidFill>
+                  <a:srgbClr val="FF0000"/>
+                </a:solidFill>
+              </a:rPr>
+              <a:t>色调</a:t>
+            </a:r>
+            <a:r>
+              <a:rPr lang="en-GB" dirty="0">
+                <a:solidFill>
+                  <a:srgbClr val="FF0000"/>
+                </a:solidFill>
+              </a:rPr>
+              <a:t>)</a:t>
+            </a:r>
+            <a:r>
+              <a:rPr lang="en-GB" dirty="0"/>
+              <a:t> is represented as angle</a:t>
             </a:r>
           </a:p>
           <a:p>
@@ -19846,8 +19978,32 @@
           <a:p>
             <a:pPr lvl="1"/>
             <a:r>
-              <a:rPr lang="en-GB" dirty="0"/>
-              <a:t>Saturation is how intense the colour is</a:t>
+              <a:rPr lang="en-GB" dirty="0">
+                <a:solidFill>
+                  <a:srgbClr val="FF0000"/>
+                </a:solidFill>
+              </a:rPr>
+              <a:t>Saturation(</a:t>
+            </a:r>
+            <a:r>
+              <a:rPr lang="zh-CN" altLang="en-US" dirty="0">
+                <a:solidFill>
+                  <a:srgbClr val="FF0000"/>
+                </a:solidFill>
+              </a:rPr>
+              <a:t>饱和度</a:t>
+            </a:r>
+            <a:r>
+              <a:rPr lang="en-US" altLang="zh-CN" dirty="0">
+                <a:solidFill>
+                  <a:srgbClr val="FF0000"/>
+                </a:solidFill>
+              </a:rPr>
+              <a:t>)</a:t>
+            </a:r>
+            <a:r>
+              <a:rPr lang="en-GB" dirty="0"/>
+              <a:t> is how intense the colour is</a:t>
             </a:r>
           </a:p>
           <a:p>
@@ -19861,7 +20017,43 @@
             <a:pPr lvl="1"/>
             <a:r>
               <a:rPr lang="en-GB" dirty="0"/>
-              <a:t>Value gives lightness from 0 (black) to 1 (white)</a:t>
+              <a:t>Value gives </a:t>
+            </a:r>
+            <a:r>
+              <a:rPr lang="en-GB" dirty="0">
+                <a:solidFill>
+                  <a:srgbClr val="FF0000"/>
+                </a:solidFill>
+              </a:rPr>
+              <a:t>lightness(</a:t>
+            </a:r>
+            <a:r>
+              <a:rPr lang="zh-CN" altLang="en-US" dirty="0">
+                <a:solidFill>
+                  <a:srgbClr val="FF0000"/>
+                </a:solidFill>
+              </a:rPr>
+              <a:t>亮度</a:t>
+            </a:r>
+            <a:r>
+              <a:rPr lang="en-US" altLang="zh-CN" dirty="0">
+                <a:solidFill>
+                  <a:srgbClr val="FF0000"/>
+                </a:solidFill>
+              </a:rPr>
+              <a:t>)</a:t>
+            </a:r>
+            <a:r>
+              <a:rPr lang="en-GB" dirty="0">
+                <a:solidFill>
+                  <a:srgbClr val="FF0000"/>
+                </a:solidFill>
+              </a:rPr>
+              <a:t> </a:t>
+            </a:r>
+            <a:r>
+              <a:rPr lang="en-GB" dirty="0"/>
+              <a:t>from 0 (black) to 1 (white)</a:t>
             </a:r>
           </a:p>
           <a:p>
@@ -20440,32 +20632,94 @@
           <a:p>
             <a:r>
               <a:rPr lang="en-GB" dirty="0"/>
-              <a:t>Digital Cameras and Scanners capture images from analogue sources</a:t>
-            </a:r>
-          </a:p>
-          <a:p>
-            <a:r>
-              <a:rPr lang="en-GB" dirty="0"/>
-              <a:t>They do this by sampling</a:t>
-            </a:r>
+              <a:t>Digital Cameras and Scanners capture images </a:t>
+            </a:r>
+            <a:r>
+              <a:rPr lang="en-GB" dirty="0">
+                <a:solidFill>
+                  <a:srgbClr val="FF0000"/>
+                </a:solidFill>
+              </a:rPr>
+              <a:t>from analogue sources</a:t>
+            </a:r>
+            <a:r>
+              <a:rPr lang="en-GB" dirty="0"/>
+              <a:t>(</a:t>
+            </a:r>
+            <a:r>
+              <a:rPr lang="zh-CN" altLang="en-US" dirty="0"/>
+              <a:t>模拟源</a:t>
+            </a:r>
+            <a:r>
+              <a:rPr lang="en-GB" dirty="0"/>
+              <a:t>)</a:t>
+            </a:r>
+          </a:p>
+          <a:p>
+            <a:r>
+              <a:rPr lang="en-GB" dirty="0"/>
+              <a:t>They do this by </a:t>
+            </a:r>
+            <a:r>
+              <a:rPr lang="en-GB" dirty="0">
+                <a:solidFill>
+                  <a:srgbClr val="FF0000"/>
+                </a:solidFill>
+              </a:rPr>
+              <a:t>sampling</a:t>
+            </a:r>
+            <a:r>
+              <a:rPr lang="en-GB" dirty="0"/>
+              <a:t>(</a:t>
+            </a:r>
+            <a:r>
+              <a:rPr lang="zh-CN" altLang="en-US" dirty="0"/>
+              <a:t>采样</a:t>
+            </a:r>
+            <a:r>
+              <a:rPr lang="en-US" altLang="zh-CN" dirty="0"/>
+              <a:t>)</a:t>
+            </a:r>
+            <a:endParaRPr lang="en-GB" dirty="0"/>
           </a:p>
           <a:p>
             <a:pPr lvl="1"/>
             <a:r>
               <a:rPr lang="en-GB" dirty="0"/>
-              <a:t>Values are collected at discrete intervals</a:t>
-            </a:r>
-          </a:p>
-          <a:p>
-            <a:r>
-              <a:rPr lang="en-GB" dirty="0"/>
-              <a:t>They have grid of microsensors to sense received light</a:t>
+              <a:t>Values are collected at discrete intervals(</a:t>
+            </a:r>
+            <a:r>
+              <a:rPr lang="zh-CN" altLang="en-US" dirty="0"/>
+              <a:t>离散间隔）</a:t>
+            </a:r>
+            <a:endParaRPr lang="en-GB" dirty="0"/>
+          </a:p>
+          <a:p>
+            <a:r>
+              <a:rPr lang="en-GB" dirty="0"/>
+              <a:t>They have grid of </a:t>
+            </a:r>
+            <a:r>
+              <a:rPr lang="en-GB" dirty="0">
+                <a:solidFill>
+                  <a:srgbClr val="FF0000"/>
+                </a:solidFill>
+              </a:rPr>
+              <a:t>microsensors</a:t>
+            </a:r>
+            <a:r>
+              <a:rPr lang="en-GB" dirty="0"/>
+              <a:t> to sense received light</a:t>
             </a:r>
           </a:p>
           <a:p>
             <a:pPr lvl="1"/>
             <a:r>
-              <a:rPr lang="en-GB" dirty="0"/>
+              <a:rPr lang="en-GB" dirty="0">
+                <a:solidFill>
+                  <a:srgbClr val="FF0000"/>
+                </a:solidFill>
+              </a:rPr>
               <a:t>Each microsensor generates a pixel</a:t>
             </a:r>
           </a:p>
@@ -20475,9 +20729,18 @@
               <a:t>The number of samples is the </a:t>
             </a:r>
             <a:r>
-              <a:rPr lang="en-GB" b="1" dirty="0"/>
+              <a:rPr lang="en-GB" b="1" dirty="0">
+                <a:solidFill>
+                  <a:srgbClr val="FF0000"/>
+                </a:solidFill>
+              </a:rPr>
               <a:t>resolution</a:t>
             </a:r>
+            <a:r>
+              <a:rPr lang="zh-CN" altLang="en-US" dirty="0"/>
+              <a:t>（分辨率）</a:t>
+            </a:r>
+            <a:endParaRPr lang="en-GB" dirty="0"/>
           </a:p>
           <a:p>
             <a:pPr lvl="1"/>
@@ -20685,13 +20948,8 @@
             <a:pPr lvl="1"/>
             <a:r>
               <a:rPr lang="en-GB" dirty="0"/>
-              <a:t>Can reduce motion blur or </a:t>
-            </a:r>
-            <a:r>
-              <a:rPr lang="en-GB"/>
-              <a:t>jerky video</a:t>
-            </a:r>
-            <a:endParaRPr lang="en-GB" dirty="0"/>
+              <a:t>Can reduce motion blur or jerky video</a:t>
+            </a:r>
           </a:p>
         </p:txBody>
       </p:sp>
